--- a/docs/売上管理タブ_操作マニュアル.pptx
+++ b/docs/売上管理タブ_操作マニュアル.pptx
@@ -10115,8 +10115,8 @@
                 </a:solidFill>
                 <a:latin typeface="Meiryo UI"/>
               </a:rPr>
-              <a:t>10% の場合: 小計 × 0.10（切捨て）
-8% の場合:  小計 × 0.08（切捨て）
+              <a:t>10% の場合: 小計 × 0.10（四捨五入）
+8% の場合:  小計 × 0.08（四捨五入）
 非課税:      0</a:t>
             </a:r>
           </a:p>
@@ -10641,7 +10641,7 @@
                 </a:solidFill>
                 <a:latin typeface="Meiryo UI"/>
               </a:rPr>
-              <a:t>小計 × 税率（切捨て）
+              <a:t>小計 × 税率（四捨五入）
 ※「税込」区分は 0</a:t>
             </a:r>
           </a:p>
@@ -13315,7 +13315,7 @@
                 </a:solidFill>
                 <a:latin typeface="Meiryo UI"/>
               </a:rPr>
-              <a:t>消費税は切り捨て計算です（例: ¥3,001 × 10% → ¥300 切捨 → ¥3,301）。
+              <a:t>消費税は四捨五入で計算します（例: ¥3,005 × 10% → ¥300.5 → ¥301 → ¥3,306）。
 「税込」区分の場合は消費税 0 として計算します。</a:t>
             </a:r>
           </a:p>
